--- a/Unit9_How_Do_You_Feel.pptx
+++ b/Unit9_How_Do_You_Feel.pptx
@@ -3098,7 +3098,7 @@
     <p:bg>
       <p:bgPr>
         <a:solidFill>
-          <a:srgbClr val="E04A6B"/>
+          <a:srgbClr val="FFC107"/>
         </a:solidFill>
         <a:effectLst/>
       </p:bgPr>
@@ -3125,7 +3125,7 @@
             <a:avLst/>
           </a:prstGeom>
           <a:solidFill>
-            <a:srgbClr val="B03552"/>
+            <a:srgbClr val="B07309"/>
           </a:solidFill>
           <a:ln>
             <a:noFill/>
@@ -3169,7 +3169,7 @@
             <a:avLst/>
           </a:prstGeom>
           <a:solidFill>
-            <a:srgbClr val="B03552"/>
+            <a:srgbClr val="B07309"/>
           </a:solidFill>
           <a:ln>
             <a:noFill/>
@@ -3224,10 +3224,10 @@
             <a:r>
               <a:rPr sz="9600" b="0">
                 <a:solidFill>
-                  <a:srgbClr val="FFFFFF"/>
-                </a:solidFill>
-              </a:rPr>
-              <a:t>💖</a:t>
+                  <a:srgbClr val="2C3E50"/>
+                </a:solidFill>
+              </a:rPr>
+              <a:t>💛</a:t>
             </a:r>
           </a:p>
         </p:txBody>
@@ -3258,7 +3258,7 @@
             <a:r>
               <a:rPr sz="4800" b="1">
                 <a:solidFill>
-                  <a:srgbClr val="FFFFFF"/>
+                  <a:srgbClr val="2C3E50"/>
                 </a:solidFill>
               </a:rPr>
               <a:t>Unit 9 · How Do You Feel?</a:t>
@@ -3292,7 +3292,7 @@
             <a:r>
               <a:rPr sz="4000" b="1">
                 <a:solidFill>
-                  <a:srgbClr val="FFFFFF"/>
+                  <a:srgbClr val="2C3E50"/>
                 </a:solidFill>
               </a:rPr>
               <a:t>你感覺怎麼樣？</a:t>
@@ -3326,7 +3326,7 @@
             <a:r>
               <a:rPr sz="2200" b="0">
                 <a:solidFill>
-                  <a:srgbClr val="FFFFFF"/>
+                  <a:srgbClr val="2C3E50"/>
                 </a:solidFill>
               </a:rPr>
               <a:t>四年級英語 · 單字 9 · 連連看 · 句型填空 · 會話</a:t>
@@ -3360,7 +3360,7 @@
             <a:r>
               <a:rPr sz="1800" b="0">
                 <a:solidFill>
-                  <a:srgbClr val="FFFFFF"/>
+                  <a:srgbClr val="2C3E50"/>
                 </a:solidFill>
               </a:rPr>
               <a:t>🌐  https://Yuchiaoniu.github.io/english/</a:t>
@@ -3382,7 +3382,7 @@
     <p:bg>
       <p:bgPr>
         <a:solidFill>
-          <a:srgbClr val="FBF4F6"/>
+          <a:srgbClr val="FFFAE5"/>
         </a:solidFill>
         <a:effectLst/>
       </p:bgPr>
@@ -3409,7 +3409,7 @@
             <a:avLst/>
           </a:prstGeom>
           <a:solidFill>
-            <a:srgbClr val="E04A6B"/>
+            <a:srgbClr val="FFC107"/>
           </a:solidFill>
           <a:ln>
             <a:noFill/>
@@ -3438,10 +3438,10 @@
             <a:r>
               <a:rPr sz="1700" b="1">
                 <a:solidFill>
-                  <a:srgbClr val="FFFFFF"/>
-                </a:solidFill>
-              </a:rPr>
-              <a:t>   Unit 9 · How Do You Feel?   💖   Pattern 1/2 句型填空</a:t>
+                  <a:srgbClr val="2C3E50"/>
+                </a:solidFill>
+              </a:rPr>
+              <a:t>   Unit 9 · How Do You Feel?   💛   Pattern 1/2 句型填空</a:t>
             </a:r>
           </a:p>
         </p:txBody>
@@ -3472,7 +3472,7 @@
             <a:r>
               <a:rPr sz="3200" b="1">
                 <a:solidFill>
-                  <a:srgbClr val="B03552"/>
+                  <a:srgbClr val="B07309"/>
                 </a:solidFill>
               </a:rPr>
               <a:t>句型 1</a:t>
@@ -3495,7 +3495,7 @@
             <a:avLst/>
           </a:prstGeom>
           <a:solidFill>
-            <a:srgbClr val="E04A6B"/>
+            <a:srgbClr val="FFC107"/>
           </a:solidFill>
           <a:ln>
             <a:noFill/>
@@ -3524,7 +3524,7 @@
             <a:r>
               <a:rPr sz="2600" b="1">
                 <a:solidFill>
-                  <a:srgbClr val="FFFFFF"/>
+                  <a:srgbClr val="2C3E50"/>
                 </a:solidFill>
               </a:rPr>
               <a:t>I feel ___.       /       I am ___.</a:t>
@@ -3592,7 +3592,7 @@
             <a:r>
               <a:rPr sz="1800" b="1">
                 <a:solidFill>
-                  <a:srgbClr val="B03552"/>
+                  <a:srgbClr val="B07309"/>
                 </a:solidFill>
               </a:rPr>
               <a:t>例句 Examples</a:t>
@@ -3619,7 +3619,7 @@
           </a:solidFill>
           <a:ln w="12700">
             <a:solidFill>
-              <a:srgbClr val="EAD4DB"/>
+              <a:srgbClr val="F1DA9B"/>
             </a:solidFill>
           </a:ln>
           <a:effectLst/>
@@ -3646,7 +3646,7 @@
             <a:r>
               <a:rPr sz="1700" b="1">
                 <a:solidFill>
-                  <a:srgbClr val="B03552"/>
+                  <a:srgbClr val="B07309"/>
                 </a:solidFill>
               </a:rPr>
               <a:t>  • I feel happy when I play games.</a:t>
@@ -3681,7 +3681,7 @@
           </a:solidFill>
           <a:ln w="12700">
             <a:solidFill>
-              <a:srgbClr val="EAD4DB"/>
+              <a:srgbClr val="F1DA9B"/>
             </a:solidFill>
           </a:ln>
           <a:effectLst/>
@@ -3708,7 +3708,7 @@
             <a:r>
               <a:rPr sz="1700" b="1">
                 <a:solidFill>
-                  <a:srgbClr val="B03552"/>
+                  <a:srgbClr val="B07309"/>
                 </a:solidFill>
               </a:rPr>
               <a:t>  • I am sad because I lost my book.</a:t>
@@ -3750,7 +3750,7 @@
             <a:r>
               <a:rPr sz="1800" b="1">
                 <a:solidFill>
-                  <a:srgbClr val="B03552"/>
+                  <a:srgbClr val="B07309"/>
                 </a:solidFill>
               </a:rPr>
               <a:t>填空練習 Fill in the blank</a:t>
@@ -3773,7 +3773,7 @@
             <a:avLst/>
           </a:prstGeom>
           <a:solidFill>
-            <a:srgbClr val="E04A6B"/>
+            <a:srgbClr val="FFC107"/>
           </a:solidFill>
           <a:ln>
             <a:noFill/>
@@ -3802,7 +3802,7 @@
             <a:r>
               <a:rPr sz="1700" b="1">
                 <a:solidFill>
-                  <a:srgbClr val="FFFFFF"/>
+                  <a:srgbClr val="2C3E50"/>
                 </a:solidFill>
               </a:rPr>
               <a:t>  1.  I feel ___ when my team wins.</a:t>
@@ -3829,7 +3829,7 @@
           </a:solidFill>
           <a:ln w="12700">
             <a:solidFill>
-              <a:srgbClr val="EAD4DB"/>
+              <a:srgbClr val="F1DA9B"/>
             </a:solidFill>
           </a:ln>
           <a:effectLst/>
@@ -3883,7 +3883,7 @@
           </a:solidFill>
           <a:ln w="12700">
             <a:solidFill>
-              <a:srgbClr val="EAD4DB"/>
+              <a:srgbClr val="F1DA9B"/>
             </a:solidFill>
           </a:ln>
           <a:effectLst/>
@@ -3937,7 +3937,7 @@
           </a:solidFill>
           <a:ln w="12700">
             <a:solidFill>
-              <a:srgbClr val="EAD4DB"/>
+              <a:srgbClr val="F1DA9B"/>
             </a:solidFill>
           </a:ln>
           <a:effectLst/>
@@ -3987,7 +3987,7 @@
             <a:avLst/>
           </a:prstGeom>
           <a:solidFill>
-            <a:srgbClr val="E04A6B"/>
+            <a:srgbClr val="FFC107"/>
           </a:solidFill>
           <a:ln>
             <a:noFill/>
@@ -4016,7 +4016,7 @@
             <a:r>
               <a:rPr sz="1700" b="1">
                 <a:solidFill>
-                  <a:srgbClr val="FFFFFF"/>
+                  <a:srgbClr val="2C3E50"/>
                 </a:solidFill>
               </a:rPr>
               <a:t>  2.  I am ___ because the dog is so big!</a:t>
@@ -4043,7 +4043,7 @@
           </a:solidFill>
           <a:ln w="12700">
             <a:solidFill>
-              <a:srgbClr val="EAD4DB"/>
+              <a:srgbClr val="F1DA9B"/>
             </a:solidFill>
           </a:ln>
           <a:effectLst/>
@@ -4097,7 +4097,7 @@
           </a:solidFill>
           <a:ln w="12700">
             <a:solidFill>
-              <a:srgbClr val="EAD4DB"/>
+              <a:srgbClr val="F1DA9B"/>
             </a:solidFill>
           </a:ln>
           <a:effectLst/>
@@ -4151,7 +4151,7 @@
           </a:solidFill>
           <a:ln w="12700">
             <a:solidFill>
-              <a:srgbClr val="EAD4DB"/>
+              <a:srgbClr val="F1DA9B"/>
             </a:solidFill>
           </a:ln>
           <a:effectLst/>
@@ -4200,7 +4200,7 @@
     <p:bg>
       <p:bgPr>
         <a:solidFill>
-          <a:srgbClr val="FBF4F6"/>
+          <a:srgbClr val="FFFAE5"/>
         </a:solidFill>
         <a:effectLst/>
       </p:bgPr>
@@ -4227,7 +4227,7 @@
             <a:avLst/>
           </a:prstGeom>
           <a:solidFill>
-            <a:srgbClr val="E04A6B"/>
+            <a:srgbClr val="FFC107"/>
           </a:solidFill>
           <a:ln>
             <a:noFill/>
@@ -4256,10 +4256,10 @@
             <a:r>
               <a:rPr sz="1700" b="1">
                 <a:solidFill>
-                  <a:srgbClr val="FFFFFF"/>
-                </a:solidFill>
-              </a:rPr>
-              <a:t>   Unit 9 · How Do You Feel?   💖   Pattern 2/2 句型填空</a:t>
+                  <a:srgbClr val="2C3E50"/>
+                </a:solidFill>
+              </a:rPr>
+              <a:t>   Unit 9 · How Do You Feel?   💛   Pattern 2/2 句型填空</a:t>
             </a:r>
           </a:p>
         </p:txBody>
@@ -4290,7 +4290,7 @@
             <a:r>
               <a:rPr sz="3200" b="1">
                 <a:solidFill>
-                  <a:srgbClr val="B03552"/>
+                  <a:srgbClr val="B07309"/>
                 </a:solidFill>
               </a:rPr>
               <a:t>句型 2</a:t>
@@ -4313,7 +4313,7 @@
             <a:avLst/>
           </a:prstGeom>
           <a:solidFill>
-            <a:srgbClr val="E04A6B"/>
+            <a:srgbClr val="FFC107"/>
           </a:solidFill>
           <a:ln>
             <a:noFill/>
@@ -4342,7 +4342,7 @@
             <a:r>
               <a:rPr sz="2600" b="1">
                 <a:solidFill>
-                  <a:srgbClr val="FFFFFF"/>
+                  <a:srgbClr val="2C3E50"/>
                 </a:solidFill>
               </a:rPr>
               <a:t>He / She looks ___.       /       Why are you ___?</a:t>
@@ -4410,7 +4410,7 @@
             <a:r>
               <a:rPr sz="1800" b="1">
                 <a:solidFill>
-                  <a:srgbClr val="B03552"/>
+                  <a:srgbClr val="B07309"/>
                 </a:solidFill>
               </a:rPr>
               <a:t>例句 Examples</a:t>
@@ -4437,7 +4437,7 @@
           </a:solidFill>
           <a:ln w="12700">
             <a:solidFill>
-              <a:srgbClr val="EAD4DB"/>
+              <a:srgbClr val="F1DA9B"/>
             </a:solidFill>
           </a:ln>
           <a:effectLst/>
@@ -4464,7 +4464,7 @@
             <a:r>
               <a:rPr sz="1700" b="1">
                 <a:solidFill>
-                  <a:srgbClr val="B03552"/>
+                  <a:srgbClr val="B07309"/>
                 </a:solidFill>
               </a:rPr>
               <a:t>  • She looks angry today.</a:t>
@@ -4499,7 +4499,7 @@
           </a:solidFill>
           <a:ln w="12700">
             <a:solidFill>
-              <a:srgbClr val="EAD4DB"/>
+              <a:srgbClr val="F1DA9B"/>
             </a:solidFill>
           </a:ln>
           <a:effectLst/>
@@ -4526,7 +4526,7 @@
             <a:r>
               <a:rPr sz="1700" b="1">
                 <a:solidFill>
-                  <a:srgbClr val="B03552"/>
+                  <a:srgbClr val="B07309"/>
                 </a:solidFill>
               </a:rPr>
               <a:t>  • Why are you so happy?</a:t>
@@ -4568,7 +4568,7 @@
             <a:r>
               <a:rPr sz="1800" b="1">
                 <a:solidFill>
-                  <a:srgbClr val="B03552"/>
+                  <a:srgbClr val="B07309"/>
                 </a:solidFill>
               </a:rPr>
               <a:t>填空練習 Fill in the blank</a:t>
@@ -4591,7 +4591,7 @@
             <a:avLst/>
           </a:prstGeom>
           <a:solidFill>
-            <a:srgbClr val="E04A6B"/>
+            <a:srgbClr val="FFC107"/>
           </a:solidFill>
           <a:ln>
             <a:noFill/>
@@ -4620,7 +4620,7 @@
             <a:r>
               <a:rPr sz="1700" b="1">
                 <a:solidFill>
-                  <a:srgbClr val="FFFFFF"/>
+                  <a:srgbClr val="2C3E50"/>
                 </a:solidFill>
               </a:rPr>
               <a:t>  1.  He looks ___. He has a fever.</a:t>
@@ -4647,7 +4647,7 @@
           </a:solidFill>
           <a:ln w="12700">
             <a:solidFill>
-              <a:srgbClr val="EAD4DB"/>
+              <a:srgbClr val="F1DA9B"/>
             </a:solidFill>
           </a:ln>
           <a:effectLst/>
@@ -4701,7 +4701,7 @@
           </a:solidFill>
           <a:ln w="12700">
             <a:solidFill>
-              <a:srgbClr val="EAD4DB"/>
+              <a:srgbClr val="F1DA9B"/>
             </a:solidFill>
           </a:ln>
           <a:effectLst/>
@@ -4755,7 +4755,7 @@
           </a:solidFill>
           <a:ln w="12700">
             <a:solidFill>
-              <a:srgbClr val="EAD4DB"/>
+              <a:srgbClr val="F1DA9B"/>
             </a:solidFill>
           </a:ln>
           <a:effectLst/>
@@ -4805,7 +4805,7 @@
             <a:avLst/>
           </a:prstGeom>
           <a:solidFill>
-            <a:srgbClr val="E04A6B"/>
+            <a:srgbClr val="FFC107"/>
           </a:solidFill>
           <a:ln>
             <a:noFill/>
@@ -4834,7 +4834,7 @@
             <a:r>
               <a:rPr sz="1700" b="1">
                 <a:solidFill>
-                  <a:srgbClr val="FFFFFF"/>
+                  <a:srgbClr val="2C3E50"/>
                 </a:solidFill>
               </a:rPr>
               <a:t>  2.  Why are you so ___? You won the contest!</a:t>
@@ -4861,7 +4861,7 @@
           </a:solidFill>
           <a:ln w="12700">
             <a:solidFill>
-              <a:srgbClr val="EAD4DB"/>
+              <a:srgbClr val="F1DA9B"/>
             </a:solidFill>
           </a:ln>
           <a:effectLst/>
@@ -4915,7 +4915,7 @@
           </a:solidFill>
           <a:ln w="12700">
             <a:solidFill>
-              <a:srgbClr val="EAD4DB"/>
+              <a:srgbClr val="F1DA9B"/>
             </a:solidFill>
           </a:ln>
           <a:effectLst/>
@@ -4969,7 +4969,7 @@
           </a:solidFill>
           <a:ln w="12700">
             <a:solidFill>
-              <a:srgbClr val="EAD4DB"/>
+              <a:srgbClr val="F1DA9B"/>
             </a:solidFill>
           </a:ln>
           <a:effectLst/>
@@ -5018,7 +5018,7 @@
     <p:bg>
       <p:bgPr>
         <a:solidFill>
-          <a:srgbClr val="E04A6B"/>
+          <a:srgbClr val="FFC107"/>
         </a:solidFill>
         <a:effectLst/>
       </p:bgPr>
@@ -5045,7 +5045,7 @@
             <a:avLst/>
           </a:prstGeom>
           <a:solidFill>
-            <a:srgbClr val="B03552"/>
+            <a:srgbClr val="B07309"/>
           </a:solidFill>
           <a:ln>
             <a:noFill/>
@@ -5100,7 +5100,7 @@
             <a:r>
               <a:rPr sz="8000" b="0">
                 <a:solidFill>
-                  <a:srgbClr val="FFFFFF"/>
+                  <a:srgbClr val="2C3E50"/>
                 </a:solidFill>
               </a:rPr>
               <a:t>💬</a:t>
@@ -5190,7 +5190,7 @@
     <p:bg>
       <p:bgPr>
         <a:solidFill>
-          <a:srgbClr val="FBF4F6"/>
+          <a:srgbClr val="FFFAE5"/>
         </a:solidFill>
         <a:effectLst/>
       </p:bgPr>
@@ -5217,7 +5217,7 @@
             <a:avLst/>
           </a:prstGeom>
           <a:solidFill>
-            <a:srgbClr val="E04A6B"/>
+            <a:srgbClr val="FFC107"/>
           </a:solidFill>
           <a:ln>
             <a:noFill/>
@@ -5246,10 +5246,10 @@
             <a:r>
               <a:rPr sz="1700" b="1">
                 <a:solidFill>
-                  <a:srgbClr val="FFFFFF"/>
-                </a:solidFill>
-              </a:rPr>
-              <a:t>   Unit 9 · How Do You Feel?   💖   Dialogue 會話</a:t>
+                  <a:srgbClr val="2C3E50"/>
+                </a:solidFill>
+              </a:rPr>
+              <a:t>   Unit 9 · How Do You Feel?   💛   Dialogue 會話</a:t>
             </a:r>
           </a:p>
         </p:txBody>
@@ -5280,7 +5280,7 @@
             <a:r>
               <a:rPr sz="3200" b="1">
                 <a:solidFill>
-                  <a:srgbClr val="B03552"/>
+                  <a:srgbClr val="B07309"/>
                 </a:solidFill>
               </a:rPr>
               <a:t>Ken 和 Sue 的對話</a:t>
@@ -5662,7 +5662,7 @@
     <p:bg>
       <p:bgPr>
         <a:solidFill>
-          <a:srgbClr val="FBF4F6"/>
+          <a:srgbClr val="FFFAE5"/>
         </a:solidFill>
         <a:effectLst/>
       </p:bgPr>
@@ -5689,7 +5689,7 @@
             <a:avLst/>
           </a:prstGeom>
           <a:solidFill>
-            <a:srgbClr val="E04A6B"/>
+            <a:srgbClr val="FFC107"/>
           </a:solidFill>
           <a:ln>
             <a:noFill/>
@@ -5718,10 +5718,10 @@
             <a:r>
               <a:rPr sz="1700" b="1">
                 <a:solidFill>
-                  <a:srgbClr val="FFFFFF"/>
-                </a:solidFill>
-              </a:rPr>
-              <a:t>   Unit 9 · How Do You Feel?   💖   Answers 解答</a:t>
+                  <a:srgbClr val="2C3E50"/>
+                </a:solidFill>
+              </a:rPr>
+              <a:t>   Unit 9 · How Do You Feel?   💛   Answers 解答</a:t>
             </a:r>
           </a:p>
         </p:txBody>
@@ -5752,7 +5752,7 @@
             <a:r>
               <a:rPr sz="3200" b="1">
                 <a:solidFill>
-                  <a:srgbClr val="B03552"/>
+                  <a:srgbClr val="B07309"/>
                 </a:solidFill>
               </a:rPr>
               <a:t>練習解答</a:t>
@@ -6146,7 +6146,7 @@
     <p:bg>
       <p:bgPr>
         <a:solidFill>
-          <a:srgbClr val="E04A6B"/>
+          <a:srgbClr val="FFC107"/>
         </a:solidFill>
         <a:effectLst/>
       </p:bgPr>
@@ -6184,7 +6184,7 @@
             <a:r>
               <a:rPr sz="9000" b="0">
                 <a:solidFill>
-                  <a:srgbClr val="FFFFFF"/>
+                  <a:srgbClr val="2C3E50"/>
                 </a:solidFill>
               </a:rPr>
               <a:t>🎉</a:t>
@@ -6218,7 +6218,7 @@
             <a:r>
               <a:rPr sz="4600" b="1">
                 <a:solidFill>
-                  <a:srgbClr val="FFFFFF"/>
+                  <a:srgbClr val="2C3E50"/>
                 </a:solidFill>
               </a:rPr>
               <a:t>Great Job!  你做得很棒！</a:t>
@@ -6252,7 +6252,7 @@
             <a:r>
               <a:rPr sz="2200" b="0">
                 <a:solidFill>
-                  <a:srgbClr val="FFFFFF"/>
+                  <a:srgbClr val="2C3E50"/>
                 </a:solidFill>
               </a:rPr>
               <a:t>Unit 9 · How Do You Feel?  你感覺怎麼樣？</a:t>
@@ -6286,7 +6286,7 @@
             <a:r>
               <a:rPr sz="2000" b="0">
                 <a:solidFill>
-                  <a:srgbClr val="FFFFFF"/>
+                  <a:srgbClr val="2C3E50"/>
                 </a:solidFill>
               </a:rPr>
               <a:t>🌐 線上互動版　https://Yuchiaoniu.github.io/english/</a:t>
@@ -6308,7 +6308,7 @@
     <p:bg>
       <p:bgPr>
         <a:solidFill>
-          <a:srgbClr val="FBF4F6"/>
+          <a:srgbClr val="FFFAE5"/>
         </a:solidFill>
         <a:effectLst/>
       </p:bgPr>
@@ -6335,7 +6335,7 @@
             <a:avLst/>
           </a:prstGeom>
           <a:solidFill>
-            <a:srgbClr val="E04A6B"/>
+            <a:srgbClr val="FFC107"/>
           </a:solidFill>
           <a:ln>
             <a:noFill/>
@@ -6364,10 +6364,10 @@
             <a:r>
               <a:rPr sz="1700" b="1">
                 <a:solidFill>
-                  <a:srgbClr val="FFFFFF"/>
-                </a:solidFill>
-              </a:rPr>
-              <a:t>   Unit 9 · How Do You Feel?   💖   Vocabulary 單字總覽</a:t>
+                  <a:srgbClr val="2C3E50"/>
+                </a:solidFill>
+              </a:rPr>
+              <a:t>   Unit 9 · How Do You Feel?   💛   Vocabulary 單字總覽</a:t>
             </a:r>
           </a:p>
         </p:txBody>
@@ -6398,7 +6398,7 @@
             <a:r>
               <a:rPr sz="3200" b="1">
                 <a:solidFill>
-                  <a:srgbClr val="B03552"/>
+                  <a:srgbClr val="B07309"/>
                 </a:solidFill>
               </a:rPr>
               <a:t>本課單字 9 個</a:t>
@@ -6425,7 +6425,7 @@
           </a:solidFill>
           <a:ln w="19050">
             <a:solidFill>
-              <a:srgbClr val="EAD4DB"/>
+              <a:srgbClr val="F1DA9B"/>
             </a:solidFill>
           </a:ln>
           <a:effectLst/>
@@ -6463,7 +6463,7 @@
             <a:r>
               <a:rPr sz="2000">
                 <a:solidFill>
-                  <a:srgbClr val="E04A6B"/>
+                  <a:srgbClr val="B07309"/>
                 </a:solidFill>
               </a:rPr>
               <a:t>快樂</a:t>
@@ -6490,7 +6490,7 @@
           </a:solidFill>
           <a:ln w="19050">
             <a:solidFill>
-              <a:srgbClr val="EAD4DB"/>
+              <a:srgbClr val="F1DA9B"/>
             </a:solidFill>
           </a:ln>
           <a:effectLst/>
@@ -6528,7 +6528,7 @@
             <a:r>
               <a:rPr sz="2000">
                 <a:solidFill>
-                  <a:srgbClr val="E04A6B"/>
+                  <a:srgbClr val="B07309"/>
                 </a:solidFill>
               </a:rPr>
               <a:t>難過</a:t>
@@ -6555,7 +6555,7 @@
           </a:solidFill>
           <a:ln w="19050">
             <a:solidFill>
-              <a:srgbClr val="EAD4DB"/>
+              <a:srgbClr val="F1DA9B"/>
             </a:solidFill>
           </a:ln>
           <a:effectLst/>
@@ -6593,7 +6593,7 @@
             <a:r>
               <a:rPr sz="2000">
                 <a:solidFill>
-                  <a:srgbClr val="E04A6B"/>
+                  <a:srgbClr val="B07309"/>
                 </a:solidFill>
               </a:rPr>
               <a:t>生氣</a:t>
@@ -6620,7 +6620,7 @@
           </a:solidFill>
           <a:ln w="19050">
             <a:solidFill>
-              <a:srgbClr val="EAD4DB"/>
+              <a:srgbClr val="F1DA9B"/>
             </a:solidFill>
           </a:ln>
           <a:effectLst/>
@@ -6658,7 +6658,7 @@
             <a:r>
               <a:rPr sz="2000">
                 <a:solidFill>
-                  <a:srgbClr val="E04A6B"/>
+                  <a:srgbClr val="B07309"/>
                 </a:solidFill>
               </a:rPr>
               <a:t>害怕</a:t>
@@ -6685,7 +6685,7 @@
           </a:solidFill>
           <a:ln w="19050">
             <a:solidFill>
-              <a:srgbClr val="EAD4DB"/>
+              <a:srgbClr val="F1DA9B"/>
             </a:solidFill>
           </a:ln>
           <a:effectLst/>
@@ -6723,7 +6723,7 @@
             <a:r>
               <a:rPr sz="2000">
                 <a:solidFill>
-                  <a:srgbClr val="E04A6B"/>
+                  <a:srgbClr val="B07309"/>
                 </a:solidFill>
               </a:rPr>
               <a:t>震驚</a:t>
@@ -6750,7 +6750,7 @@
           </a:solidFill>
           <a:ln w="19050">
             <a:solidFill>
-              <a:srgbClr val="EAD4DB"/>
+              <a:srgbClr val="F1DA9B"/>
             </a:solidFill>
           </a:ln>
           <a:effectLst/>
@@ -6788,7 +6788,7 @@
             <a:r>
               <a:rPr sz="2000">
                 <a:solidFill>
-                  <a:srgbClr val="E04A6B"/>
+                  <a:srgbClr val="B07309"/>
                 </a:solidFill>
               </a:rPr>
               <a:t>生病</a:t>
@@ -6815,7 +6815,7 @@
           </a:solidFill>
           <a:ln w="19050">
             <a:solidFill>
-              <a:srgbClr val="EAD4DB"/>
+              <a:srgbClr val="F1DA9B"/>
             </a:solidFill>
           </a:ln>
           <a:effectLst/>
@@ -6853,7 +6853,7 @@
             <a:r>
               <a:rPr sz="2000">
                 <a:solidFill>
-                  <a:srgbClr val="E04A6B"/>
+                  <a:srgbClr val="B07309"/>
                 </a:solidFill>
               </a:rPr>
               <a:t>驕傲</a:t>
@@ -6880,7 +6880,7 @@
           </a:solidFill>
           <a:ln w="19050">
             <a:solidFill>
-              <a:srgbClr val="EAD4DB"/>
+              <a:srgbClr val="F1DA9B"/>
             </a:solidFill>
           </a:ln>
           <a:effectLst/>
@@ -6918,7 +6918,7 @@
             <a:r>
               <a:rPr sz="2000">
                 <a:solidFill>
-                  <a:srgbClr val="E04A6B"/>
+                  <a:srgbClr val="B07309"/>
                 </a:solidFill>
               </a:rPr>
               <a:t>有自信</a:t>
@@ -6945,7 +6945,7 @@
           </a:solidFill>
           <a:ln w="19050">
             <a:solidFill>
-              <a:srgbClr val="EAD4DB"/>
+              <a:srgbClr val="F1DA9B"/>
             </a:solidFill>
           </a:ln>
           <a:effectLst/>
@@ -6983,7 +6983,7 @@
             <a:r>
               <a:rPr sz="2000">
                 <a:solidFill>
-                  <a:srgbClr val="E04A6B"/>
+                  <a:srgbClr val="B07309"/>
                 </a:solidFill>
               </a:rPr>
               <a:t>酷</a:t>
@@ -7005,7 +7005,7 @@
     <p:bg>
       <p:bgPr>
         <a:solidFill>
-          <a:srgbClr val="FBF4F6"/>
+          <a:srgbClr val="FFFAE5"/>
         </a:solidFill>
         <a:effectLst/>
       </p:bgPr>
@@ -7032,7 +7032,7 @@
             <a:avLst/>
           </a:prstGeom>
           <a:solidFill>
-            <a:srgbClr val="E04A6B"/>
+            <a:srgbClr val="FFC107"/>
           </a:solidFill>
           <a:ln>
             <a:noFill/>
@@ -7061,10 +7061,10 @@
             <a:r>
               <a:rPr sz="1700" b="1">
                 <a:solidFill>
-                  <a:srgbClr val="FFFFFF"/>
-                </a:solidFill>
-              </a:rPr>
-              <a:t>   Unit 9 · How Do You Feel?   💖   Vocabulary 1/3</a:t>
+                  <a:srgbClr val="2C3E50"/>
+                </a:solidFill>
+              </a:rPr>
+              <a:t>   Unit 9 · How Do You Feel?   💛   Vocabulary 1/3</a:t>
             </a:r>
           </a:p>
         </p:txBody>
@@ -7095,7 +7095,7 @@
             <a:r>
               <a:rPr sz="3200" b="1">
                 <a:solidFill>
-                  <a:srgbClr val="B03552"/>
+                  <a:srgbClr val="B07309"/>
                 </a:solidFill>
               </a:rPr>
               <a:t>情緒詞（一）</a:t>
@@ -7122,7 +7122,7 @@
           </a:solidFill>
           <a:ln w="22225">
             <a:solidFill>
-              <a:srgbClr val="E04A6B"/>
+              <a:srgbClr val="B07309"/>
             </a:solidFill>
           </a:ln>
           <a:effectLst/>
@@ -7156,7 +7156,7 @@
             <a:r>
               <a:rPr sz="3200" b="1">
                 <a:solidFill>
-                  <a:srgbClr val="B03552"/>
+                  <a:srgbClr val="B07309"/>
                 </a:solidFill>
               </a:rPr>
               <a:t>happy</a:t>
@@ -7205,7 +7205,7 @@
           </a:solidFill>
           <a:ln w="22225">
             <a:solidFill>
-              <a:srgbClr val="E04A6B"/>
+              <a:srgbClr val="B07309"/>
             </a:solidFill>
           </a:ln>
           <a:effectLst/>
@@ -7239,7 +7239,7 @@
             <a:r>
               <a:rPr sz="3200" b="1">
                 <a:solidFill>
-                  <a:srgbClr val="B03552"/>
+                  <a:srgbClr val="B07309"/>
                 </a:solidFill>
               </a:rPr>
               <a:t>sad</a:t>
@@ -7288,7 +7288,7 @@
           </a:solidFill>
           <a:ln w="22225">
             <a:solidFill>
-              <a:srgbClr val="E04A6B"/>
+              <a:srgbClr val="B07309"/>
             </a:solidFill>
           </a:ln>
           <a:effectLst/>
@@ -7322,7 +7322,7 @@
             <a:r>
               <a:rPr sz="3200" b="1">
                 <a:solidFill>
-                  <a:srgbClr val="B03552"/>
+                  <a:srgbClr val="B07309"/>
                 </a:solidFill>
               </a:rPr>
               <a:t>angry</a:t>
@@ -7366,7 +7366,7 @@
     <p:bg>
       <p:bgPr>
         <a:solidFill>
-          <a:srgbClr val="FBF4F6"/>
+          <a:srgbClr val="FFFAE5"/>
         </a:solidFill>
         <a:effectLst/>
       </p:bgPr>
@@ -7393,7 +7393,7 @@
             <a:avLst/>
           </a:prstGeom>
           <a:solidFill>
-            <a:srgbClr val="E04A6B"/>
+            <a:srgbClr val="FFC107"/>
           </a:solidFill>
           <a:ln>
             <a:noFill/>
@@ -7422,10 +7422,10 @@
             <a:r>
               <a:rPr sz="1700" b="1">
                 <a:solidFill>
-                  <a:srgbClr val="FFFFFF"/>
-                </a:solidFill>
-              </a:rPr>
-              <a:t>   Unit 9 · How Do You Feel?   💖   Vocabulary 2/3</a:t>
+                  <a:srgbClr val="2C3E50"/>
+                </a:solidFill>
+              </a:rPr>
+              <a:t>   Unit 9 · How Do You Feel?   💛   Vocabulary 2/3</a:t>
             </a:r>
           </a:p>
         </p:txBody>
@@ -7456,7 +7456,7 @@
             <a:r>
               <a:rPr sz="3200" b="1">
                 <a:solidFill>
-                  <a:srgbClr val="B03552"/>
+                  <a:srgbClr val="B07309"/>
                 </a:solidFill>
               </a:rPr>
               <a:t>情緒詞（二）</a:t>
@@ -7483,7 +7483,7 @@
           </a:solidFill>
           <a:ln w="22225">
             <a:solidFill>
-              <a:srgbClr val="E04A6B"/>
+              <a:srgbClr val="B07309"/>
             </a:solidFill>
           </a:ln>
           <a:effectLst/>
@@ -7517,7 +7517,7 @@
             <a:r>
               <a:rPr sz="3200" b="1">
                 <a:solidFill>
-                  <a:srgbClr val="B03552"/>
+                  <a:srgbClr val="B07309"/>
                 </a:solidFill>
               </a:rPr>
               <a:t>scared</a:t>
@@ -7566,7 +7566,7 @@
           </a:solidFill>
           <a:ln w="22225">
             <a:solidFill>
-              <a:srgbClr val="E04A6B"/>
+              <a:srgbClr val="B07309"/>
             </a:solidFill>
           </a:ln>
           <a:effectLst/>
@@ -7600,7 +7600,7 @@
             <a:r>
               <a:rPr sz="3200" b="1">
                 <a:solidFill>
-                  <a:srgbClr val="B03552"/>
+                  <a:srgbClr val="B07309"/>
                 </a:solidFill>
               </a:rPr>
               <a:t>shocked</a:t>
@@ -7649,7 +7649,7 @@
           </a:solidFill>
           <a:ln w="22225">
             <a:solidFill>
-              <a:srgbClr val="E04A6B"/>
+              <a:srgbClr val="B07309"/>
             </a:solidFill>
           </a:ln>
           <a:effectLst/>
@@ -7683,7 +7683,7 @@
             <a:r>
               <a:rPr sz="3200" b="1">
                 <a:solidFill>
-                  <a:srgbClr val="B03552"/>
+                  <a:srgbClr val="B07309"/>
                 </a:solidFill>
               </a:rPr>
               <a:t>sick</a:t>
@@ -7727,7 +7727,7 @@
     <p:bg>
       <p:bgPr>
         <a:solidFill>
-          <a:srgbClr val="FBF4F6"/>
+          <a:srgbClr val="FFFAE5"/>
         </a:solidFill>
         <a:effectLst/>
       </p:bgPr>
@@ -7754,7 +7754,7 @@
             <a:avLst/>
           </a:prstGeom>
           <a:solidFill>
-            <a:srgbClr val="E04A6B"/>
+            <a:srgbClr val="FFC107"/>
           </a:solidFill>
           <a:ln>
             <a:noFill/>
@@ -7783,10 +7783,10 @@
             <a:r>
               <a:rPr sz="1700" b="1">
                 <a:solidFill>
-                  <a:srgbClr val="FFFFFF"/>
-                </a:solidFill>
-              </a:rPr>
-              <a:t>   Unit 9 · How Do You Feel?   💖   Vocabulary 3/3</a:t>
+                  <a:srgbClr val="2C3E50"/>
+                </a:solidFill>
+              </a:rPr>
+              <a:t>   Unit 9 · How Do You Feel?   💛   Vocabulary 3/3</a:t>
             </a:r>
           </a:p>
         </p:txBody>
@@ -7817,7 +7817,7 @@
             <a:r>
               <a:rPr sz="3200" b="1">
                 <a:solidFill>
-                  <a:srgbClr val="B03552"/>
+                  <a:srgbClr val="B07309"/>
                 </a:solidFill>
               </a:rPr>
               <a:t>情緒詞（三）</a:t>
@@ -7844,7 +7844,7 @@
           </a:solidFill>
           <a:ln w="22225">
             <a:solidFill>
-              <a:srgbClr val="E04A6B"/>
+              <a:srgbClr val="B07309"/>
             </a:solidFill>
           </a:ln>
           <a:effectLst/>
@@ -7878,7 +7878,7 @@
             <a:r>
               <a:rPr sz="3200" b="1">
                 <a:solidFill>
-                  <a:srgbClr val="B03552"/>
+                  <a:srgbClr val="B07309"/>
                 </a:solidFill>
               </a:rPr>
               <a:t>proud</a:t>
@@ -7927,7 +7927,7 @@
           </a:solidFill>
           <a:ln w="22225">
             <a:solidFill>
-              <a:srgbClr val="E04A6B"/>
+              <a:srgbClr val="B07309"/>
             </a:solidFill>
           </a:ln>
           <a:effectLst/>
@@ -7961,7 +7961,7 @@
             <a:r>
               <a:rPr sz="3200" b="1">
                 <a:solidFill>
-                  <a:srgbClr val="B03552"/>
+                  <a:srgbClr val="B07309"/>
                 </a:solidFill>
               </a:rPr>
               <a:t>confident</a:t>
@@ -8010,7 +8010,7 @@
           </a:solidFill>
           <a:ln w="22225">
             <a:solidFill>
-              <a:srgbClr val="E04A6B"/>
+              <a:srgbClr val="B07309"/>
             </a:solidFill>
           </a:ln>
           <a:effectLst/>
@@ -8044,7 +8044,7 @@
             <a:r>
               <a:rPr sz="3200" b="1">
                 <a:solidFill>
-                  <a:srgbClr val="B03552"/>
+                  <a:srgbClr val="B07309"/>
                 </a:solidFill>
               </a:rPr>
               <a:t>cool</a:t>
@@ -8088,7 +8088,7 @@
     <p:bg>
       <p:bgPr>
         <a:solidFill>
-          <a:srgbClr val="E04A6B"/>
+          <a:srgbClr val="FFC107"/>
         </a:solidFill>
         <a:effectLst/>
       </p:bgPr>
@@ -8115,7 +8115,7 @@
             <a:avLst/>
           </a:prstGeom>
           <a:solidFill>
-            <a:srgbClr val="B03552"/>
+            <a:srgbClr val="B07309"/>
           </a:solidFill>
           <a:ln>
             <a:noFill/>
@@ -8170,7 +8170,7 @@
             <a:r>
               <a:rPr sz="8000" b="0">
                 <a:solidFill>
-                  <a:srgbClr val="FFFFFF"/>
+                  <a:srgbClr val="2C3E50"/>
                 </a:solidFill>
               </a:rPr>
               <a:t>🎯</a:t>
@@ -8260,7 +8260,7 @@
     <p:bg>
       <p:bgPr>
         <a:solidFill>
-          <a:srgbClr val="FBF4F6"/>
+          <a:srgbClr val="FFFAE5"/>
         </a:solidFill>
         <a:effectLst/>
       </p:bgPr>
@@ -8287,7 +8287,7 @@
             <a:avLst/>
           </a:prstGeom>
           <a:solidFill>
-            <a:srgbClr val="E04A6B"/>
+            <a:srgbClr val="FFC107"/>
           </a:solidFill>
           <a:ln>
             <a:noFill/>
@@ -8316,10 +8316,10 @@
             <a:r>
               <a:rPr sz="1700" b="1">
                 <a:solidFill>
-                  <a:srgbClr val="FFFFFF"/>
-                </a:solidFill>
-              </a:rPr>
-              <a:t>   Unit 9 · How Do You Feel?   💖   Matching 1 連連看（一）</a:t>
+                  <a:srgbClr val="2C3E50"/>
+                </a:solidFill>
+              </a:rPr>
+              <a:t>   Unit 9 · How Do You Feel?   💛   Matching 1 連連看（一）</a:t>
             </a:r>
           </a:p>
         </p:txBody>
@@ -8350,7 +8350,7 @@
             <a:r>
               <a:rPr sz="3200" b="1">
                 <a:solidFill>
-                  <a:srgbClr val="B03552"/>
+                  <a:srgbClr val="B07309"/>
                 </a:solidFill>
               </a:rPr>
               <a:t>連連看（一）：單字 ↔ 中文</a:t>
@@ -8411,7 +8411,7 @@
           </a:solidFill>
           <a:ln w="19050">
             <a:solidFill>
-              <a:srgbClr val="E04A6B"/>
+              <a:srgbClr val="B07309"/>
             </a:solidFill>
           </a:ln>
           <a:effectLst/>
@@ -8438,7 +8438,7 @@
             <a:r>
               <a:rPr sz="2200" b="1">
                 <a:solidFill>
-                  <a:srgbClr val="E04A6B"/>
+                  <a:srgbClr val="B07309"/>
                 </a:solidFill>
               </a:rPr>
               <a:t>  A.   </a:t>
@@ -8473,7 +8473,7 @@
           </a:solidFill>
           <a:ln w="19050">
             <a:solidFill>
-              <a:srgbClr val="E04A6B"/>
+              <a:srgbClr val="B07309"/>
             </a:solidFill>
           </a:ln>
           <a:effectLst/>
@@ -8500,7 +8500,7 @@
             <a:r>
               <a:rPr sz="2200" b="1">
                 <a:solidFill>
-                  <a:srgbClr val="E04A6B"/>
+                  <a:srgbClr val="B07309"/>
                 </a:solidFill>
               </a:rPr>
               <a:t>  B.   </a:t>
@@ -8535,7 +8535,7 @@
           </a:solidFill>
           <a:ln w="19050">
             <a:solidFill>
-              <a:srgbClr val="E04A6B"/>
+              <a:srgbClr val="B07309"/>
             </a:solidFill>
           </a:ln>
           <a:effectLst/>
@@ -8562,7 +8562,7 @@
             <a:r>
               <a:rPr sz="2200" b="1">
                 <a:solidFill>
-                  <a:srgbClr val="E04A6B"/>
+                  <a:srgbClr val="B07309"/>
                 </a:solidFill>
               </a:rPr>
               <a:t>  C.   </a:t>
@@ -8597,7 +8597,7 @@
           </a:solidFill>
           <a:ln w="19050">
             <a:solidFill>
-              <a:srgbClr val="E04A6B"/>
+              <a:srgbClr val="B07309"/>
             </a:solidFill>
           </a:ln>
           <a:effectLst/>
@@ -8624,7 +8624,7 @@
             <a:r>
               <a:rPr sz="2200" b="1">
                 <a:solidFill>
-                  <a:srgbClr val="E04A6B"/>
+                  <a:srgbClr val="B07309"/>
                 </a:solidFill>
               </a:rPr>
               <a:t>  D.   </a:t>
@@ -8659,7 +8659,7 @@
           </a:solidFill>
           <a:ln w="19050">
             <a:solidFill>
-              <a:srgbClr val="E04A6B"/>
+              <a:srgbClr val="B07309"/>
             </a:solidFill>
           </a:ln>
           <a:effectLst/>
@@ -8686,7 +8686,7 @@
             <a:r>
               <a:rPr sz="2200" b="1">
                 <a:solidFill>
-                  <a:srgbClr val="E04A6B"/>
+                  <a:srgbClr val="B07309"/>
                 </a:solidFill>
               </a:rPr>
               <a:t>  E.   </a:t>
@@ -8721,7 +8721,7 @@
           </a:solidFill>
           <a:ln w="19050">
             <a:solidFill>
-              <a:srgbClr val="E04A6B"/>
+              <a:srgbClr val="B07309"/>
             </a:solidFill>
           </a:ln>
           <a:effectLst/>
@@ -8748,7 +8748,7 @@
             <a:r>
               <a:rPr sz="2200" b="1">
                 <a:solidFill>
-                  <a:srgbClr val="E04A6B"/>
+                  <a:srgbClr val="B07309"/>
                 </a:solidFill>
               </a:rPr>
               <a:t>  1.   </a:t>
@@ -8783,7 +8783,7 @@
           </a:solidFill>
           <a:ln w="19050">
             <a:solidFill>
-              <a:srgbClr val="E04A6B"/>
+              <a:srgbClr val="B07309"/>
             </a:solidFill>
           </a:ln>
           <a:effectLst/>
@@ -8810,7 +8810,7 @@
             <a:r>
               <a:rPr sz="2200" b="1">
                 <a:solidFill>
-                  <a:srgbClr val="E04A6B"/>
+                  <a:srgbClr val="B07309"/>
                 </a:solidFill>
               </a:rPr>
               <a:t>  2.   </a:t>
@@ -8845,7 +8845,7 @@
           </a:solidFill>
           <a:ln w="19050">
             <a:solidFill>
-              <a:srgbClr val="E04A6B"/>
+              <a:srgbClr val="B07309"/>
             </a:solidFill>
           </a:ln>
           <a:effectLst/>
@@ -8872,7 +8872,7 @@
             <a:r>
               <a:rPr sz="2200" b="1">
                 <a:solidFill>
-                  <a:srgbClr val="E04A6B"/>
+                  <a:srgbClr val="B07309"/>
                 </a:solidFill>
               </a:rPr>
               <a:t>  3.   </a:t>
@@ -8907,7 +8907,7 @@
           </a:solidFill>
           <a:ln w="19050">
             <a:solidFill>
-              <a:srgbClr val="E04A6B"/>
+              <a:srgbClr val="B07309"/>
             </a:solidFill>
           </a:ln>
           <a:effectLst/>
@@ -8934,7 +8934,7 @@
             <a:r>
               <a:rPr sz="2200" b="1">
                 <a:solidFill>
-                  <a:srgbClr val="E04A6B"/>
+                  <a:srgbClr val="B07309"/>
                 </a:solidFill>
               </a:rPr>
               <a:t>  4.   </a:t>
@@ -8969,7 +8969,7 @@
           </a:solidFill>
           <a:ln w="19050">
             <a:solidFill>
-              <a:srgbClr val="E04A6B"/>
+              <a:srgbClr val="B07309"/>
             </a:solidFill>
           </a:ln>
           <a:effectLst/>
@@ -8996,7 +8996,7 @@
             <a:r>
               <a:rPr sz="2200" b="1">
                 <a:solidFill>
-                  <a:srgbClr val="E04A6B"/>
+                  <a:srgbClr val="B07309"/>
                 </a:solidFill>
               </a:rPr>
               <a:t>  5.   </a:t>
@@ -9026,7 +9026,7 @@
     <p:bg>
       <p:bgPr>
         <a:solidFill>
-          <a:srgbClr val="FBF4F6"/>
+          <a:srgbClr val="FFFAE5"/>
         </a:solidFill>
         <a:effectLst/>
       </p:bgPr>
@@ -9053,7 +9053,7 @@
             <a:avLst/>
           </a:prstGeom>
           <a:solidFill>
-            <a:srgbClr val="E04A6B"/>
+            <a:srgbClr val="FFC107"/>
           </a:solidFill>
           <a:ln>
             <a:noFill/>
@@ -9082,10 +9082,10 @@
             <a:r>
               <a:rPr sz="1700" b="1">
                 <a:solidFill>
-                  <a:srgbClr val="FFFFFF"/>
-                </a:solidFill>
-              </a:rPr>
-              <a:t>   Unit 9 · How Do You Feel?   💖   Matching 2 連連看（二）</a:t>
+                  <a:srgbClr val="2C3E50"/>
+                </a:solidFill>
+              </a:rPr>
+              <a:t>   Unit 9 · How Do You Feel?   💛   Matching 2 連連看（二）</a:t>
             </a:r>
           </a:p>
         </p:txBody>
@@ -9116,7 +9116,7 @@
             <a:r>
               <a:rPr sz="3200" b="1">
                 <a:solidFill>
-                  <a:srgbClr val="B03552"/>
+                  <a:srgbClr val="B07309"/>
                 </a:solidFill>
               </a:rPr>
               <a:t>連連看（二）：情境 ↔ 情緒</a:t>
@@ -9177,7 +9177,7 @@
           </a:solidFill>
           <a:ln w="19050">
             <a:solidFill>
-              <a:srgbClr val="E04A6B"/>
+              <a:srgbClr val="B07309"/>
             </a:solidFill>
           </a:ln>
           <a:effectLst/>
@@ -9204,7 +9204,7 @@
             <a:r>
               <a:rPr sz="2200" b="1">
                 <a:solidFill>
-                  <a:srgbClr val="E04A6B"/>
+                  <a:srgbClr val="B07309"/>
                 </a:solidFill>
               </a:rPr>
               <a:t>  A.   </a:t>
@@ -9239,7 +9239,7 @@
           </a:solidFill>
           <a:ln w="19050">
             <a:solidFill>
-              <a:srgbClr val="E04A6B"/>
+              <a:srgbClr val="B07309"/>
             </a:solidFill>
           </a:ln>
           <a:effectLst/>
@@ -9266,7 +9266,7 @@
             <a:r>
               <a:rPr sz="2200" b="1">
                 <a:solidFill>
-                  <a:srgbClr val="E04A6B"/>
+                  <a:srgbClr val="B07309"/>
                 </a:solidFill>
               </a:rPr>
               <a:t>  B.   </a:t>
@@ -9301,7 +9301,7 @@
           </a:solidFill>
           <a:ln w="19050">
             <a:solidFill>
-              <a:srgbClr val="E04A6B"/>
+              <a:srgbClr val="B07309"/>
             </a:solidFill>
           </a:ln>
           <a:effectLst/>
@@ -9328,7 +9328,7 @@
             <a:r>
               <a:rPr sz="2200" b="1">
                 <a:solidFill>
-                  <a:srgbClr val="E04A6B"/>
+                  <a:srgbClr val="B07309"/>
                 </a:solidFill>
               </a:rPr>
               <a:t>  C.   </a:t>
@@ -9363,7 +9363,7 @@
           </a:solidFill>
           <a:ln w="19050">
             <a:solidFill>
-              <a:srgbClr val="E04A6B"/>
+              <a:srgbClr val="B07309"/>
             </a:solidFill>
           </a:ln>
           <a:effectLst/>
@@ -9390,7 +9390,7 @@
             <a:r>
               <a:rPr sz="2200" b="1">
                 <a:solidFill>
-                  <a:srgbClr val="E04A6B"/>
+                  <a:srgbClr val="B07309"/>
                 </a:solidFill>
               </a:rPr>
               <a:t>  D.   </a:t>
@@ -9425,7 +9425,7 @@
           </a:solidFill>
           <a:ln w="19050">
             <a:solidFill>
-              <a:srgbClr val="E04A6B"/>
+              <a:srgbClr val="B07309"/>
             </a:solidFill>
           </a:ln>
           <a:effectLst/>
@@ -9452,7 +9452,7 @@
             <a:r>
               <a:rPr sz="2200" b="1">
                 <a:solidFill>
-                  <a:srgbClr val="E04A6B"/>
+                  <a:srgbClr val="B07309"/>
                 </a:solidFill>
               </a:rPr>
               <a:t>  1.   </a:t>
@@ -9487,7 +9487,7 @@
           </a:solidFill>
           <a:ln w="19050">
             <a:solidFill>
-              <a:srgbClr val="E04A6B"/>
+              <a:srgbClr val="B07309"/>
             </a:solidFill>
           </a:ln>
           <a:effectLst/>
@@ -9514,7 +9514,7 @@
             <a:r>
               <a:rPr sz="2200" b="1">
                 <a:solidFill>
-                  <a:srgbClr val="E04A6B"/>
+                  <a:srgbClr val="B07309"/>
                 </a:solidFill>
               </a:rPr>
               <a:t>  2.   </a:t>
@@ -9549,7 +9549,7 @@
           </a:solidFill>
           <a:ln w="19050">
             <a:solidFill>
-              <a:srgbClr val="E04A6B"/>
+              <a:srgbClr val="B07309"/>
             </a:solidFill>
           </a:ln>
           <a:effectLst/>
@@ -9576,7 +9576,7 @@
             <a:r>
               <a:rPr sz="2200" b="1">
                 <a:solidFill>
-                  <a:srgbClr val="E04A6B"/>
+                  <a:srgbClr val="B07309"/>
                 </a:solidFill>
               </a:rPr>
               <a:t>  3.   </a:t>
@@ -9611,7 +9611,7 @@
           </a:solidFill>
           <a:ln w="19050">
             <a:solidFill>
-              <a:srgbClr val="E04A6B"/>
+              <a:srgbClr val="B07309"/>
             </a:solidFill>
           </a:ln>
           <a:effectLst/>
@@ -9638,7 +9638,7 @@
             <a:r>
               <a:rPr sz="2200" b="1">
                 <a:solidFill>
-                  <a:srgbClr val="E04A6B"/>
+                  <a:srgbClr val="B07309"/>
                 </a:solidFill>
               </a:rPr>
               <a:t>  4.   </a:t>
@@ -9668,7 +9668,7 @@
     <p:bg>
       <p:bgPr>
         <a:solidFill>
-          <a:srgbClr val="E04A6B"/>
+          <a:srgbClr val="FFC107"/>
         </a:solidFill>
         <a:effectLst/>
       </p:bgPr>
@@ -9695,7 +9695,7 @@
             <a:avLst/>
           </a:prstGeom>
           <a:solidFill>
-            <a:srgbClr val="B03552"/>
+            <a:srgbClr val="B07309"/>
           </a:solidFill>
           <a:ln>
             <a:noFill/>
@@ -9750,7 +9750,7 @@
             <a:r>
               <a:rPr sz="8000" b="0">
                 <a:solidFill>
-                  <a:srgbClr val="FFFFFF"/>
+                  <a:srgbClr val="2C3E50"/>
                 </a:solidFill>
               </a:rPr>
               <a:t>📝</a:t>
